--- a/examples/pm10_memo_temp/memo_temp_merged.pptx
+++ b/examples/pm10_memo_temp/memo_temp_merged.pptx
@@ -816,7 +816,7 @@
     </p:spTree>
     <p:extLst>
       <p:ext uri="{BB962C8B-B14F-4D97-AF65-F5344CB8AC3E}">
-        <p14:creationId xmlns:p14="http://schemas.microsoft.com/office/powerpoint/2010/main" val="3607905755"/>
+        <p14:creationId xmlns:p14="http://schemas.microsoft.com/office/powerpoint/2010/main" val="993383978"/>
       </p:ext>
     </p:extLst>
   </p:cSld>
@@ -1031,7 +1031,7 @@
     </p:spTree>
     <p:extLst>
       <p:ext uri="{BB962C8B-B14F-4D97-AF65-F5344CB8AC3E}">
-        <p14:creationId xmlns:p14="http://schemas.microsoft.com/office/powerpoint/2010/main" val="58848335"/>
+        <p14:creationId xmlns:p14="http://schemas.microsoft.com/office/powerpoint/2010/main" val="1145512525"/>
       </p:ext>
     </p:extLst>
   </p:cSld>
@@ -1270,7 +1270,7 @@
     </p:spTree>
     <p:extLst>
       <p:ext uri="{BB962C8B-B14F-4D97-AF65-F5344CB8AC3E}">
-        <p14:creationId xmlns:p14="http://schemas.microsoft.com/office/powerpoint/2010/main" val="260120969"/>
+        <p14:creationId xmlns:p14="http://schemas.microsoft.com/office/powerpoint/2010/main" val="2674528195"/>
       </p:ext>
     </p:extLst>
   </p:cSld>
@@ -4976,7 +4976,7 @@
     </p:spTree>
     <p:extLst>
       <p:ext uri="{BB962C8B-B14F-4D97-AF65-F5344CB8AC3E}">
-        <p14:creationId xmlns:p14="http://schemas.microsoft.com/office/powerpoint/2010/main" val="4262330874"/>
+        <p14:creationId xmlns:p14="http://schemas.microsoft.com/office/powerpoint/2010/main" val="1765961892"/>
       </p:ext>
     </p:extLst>
   </p:cSld>
@@ -5501,7 +5501,7 @@
     </p:spTree>
     <p:extLst>
       <p:ext uri="{BB962C8B-B14F-4D97-AF65-F5344CB8AC3E}">
-        <p14:creationId xmlns:p14="http://schemas.microsoft.com/office/powerpoint/2010/main" val="3515081613"/>
+        <p14:creationId xmlns:p14="http://schemas.microsoft.com/office/powerpoint/2010/main" val="3285984293"/>
       </p:ext>
     </p:extLst>
   </p:cSld>
@@ -6047,7 +6047,7 @@
     </p:spTree>
     <p:extLst>
       <p:ext uri="{BB962C8B-B14F-4D97-AF65-F5344CB8AC3E}">
-        <p14:creationId xmlns:p14="http://schemas.microsoft.com/office/powerpoint/2010/main" val="88421338"/>
+        <p14:creationId xmlns:p14="http://schemas.microsoft.com/office/powerpoint/2010/main" val="3424629547"/>
       </p:ext>
     </p:extLst>
   </p:cSld>

--- a/examples/pm10_memo_temp/memo_temp_merged.pptx
+++ b/examples/pm10_memo_temp/memo_temp_merged.pptx
@@ -240,7 +240,7 @@
           <a:p>
             <a:fld id="{294670BC-B8C6-44A7-84E1-23632D8FD86F}" type="datetimeFigureOut">
               <a:rPr kumimoji="1" lang="ja-JP" altLang="en-US" smtClean="0"/>
-              <a:t>2026/6/4</a:t>
+              <a:t>2026/6/6</a:t>
             </a:fld>
             <a:endParaRPr kumimoji="1" lang="ja-JP" altLang="en-US"/>
           </a:p>
@@ -816,7 +816,7 @@
     </p:spTree>
     <p:extLst>
       <p:ext uri="{BB962C8B-B14F-4D97-AF65-F5344CB8AC3E}">
-        <p14:creationId xmlns:p14="http://schemas.microsoft.com/office/powerpoint/2010/main" val="993383978"/>
+        <p14:creationId xmlns:p14="http://schemas.microsoft.com/office/powerpoint/2010/main" val="328287762"/>
       </p:ext>
     </p:extLst>
   </p:cSld>
@@ -1031,7 +1031,7 @@
     </p:spTree>
     <p:extLst>
       <p:ext uri="{BB962C8B-B14F-4D97-AF65-F5344CB8AC3E}">
-        <p14:creationId xmlns:p14="http://schemas.microsoft.com/office/powerpoint/2010/main" val="1145512525"/>
+        <p14:creationId xmlns:p14="http://schemas.microsoft.com/office/powerpoint/2010/main" val="4178194421"/>
       </p:ext>
     </p:extLst>
   </p:cSld>
@@ -1270,7 +1270,7 @@
     </p:spTree>
     <p:extLst>
       <p:ext uri="{BB962C8B-B14F-4D97-AF65-F5344CB8AC3E}">
-        <p14:creationId xmlns:p14="http://schemas.microsoft.com/office/powerpoint/2010/main" val="2674528195"/>
+        <p14:creationId xmlns:p14="http://schemas.microsoft.com/office/powerpoint/2010/main" val="3961337242"/>
       </p:ext>
     </p:extLst>
   </p:cSld>
@@ -4976,7 +4976,7 @@
     </p:spTree>
     <p:extLst>
       <p:ext uri="{BB962C8B-B14F-4D97-AF65-F5344CB8AC3E}">
-        <p14:creationId xmlns:p14="http://schemas.microsoft.com/office/powerpoint/2010/main" val="1765961892"/>
+        <p14:creationId xmlns:p14="http://schemas.microsoft.com/office/powerpoint/2010/main" val="3735922812"/>
       </p:ext>
     </p:extLst>
   </p:cSld>
@@ -5501,7 +5501,7 @@
     </p:spTree>
     <p:extLst>
       <p:ext uri="{BB962C8B-B14F-4D97-AF65-F5344CB8AC3E}">
-        <p14:creationId xmlns:p14="http://schemas.microsoft.com/office/powerpoint/2010/main" val="3285984293"/>
+        <p14:creationId xmlns:p14="http://schemas.microsoft.com/office/powerpoint/2010/main" val="466772478"/>
       </p:ext>
     </p:extLst>
   </p:cSld>
@@ -6047,7 +6047,7 @@
     </p:spTree>
     <p:extLst>
       <p:ext uri="{BB962C8B-B14F-4D97-AF65-F5344CB8AC3E}">
-        <p14:creationId xmlns:p14="http://schemas.microsoft.com/office/powerpoint/2010/main" val="3424629547"/>
+        <p14:creationId xmlns:p14="http://schemas.microsoft.com/office/powerpoint/2010/main" val="3451501111"/>
       </p:ext>
     </p:extLst>
   </p:cSld>
